--- a/assets/powerpoints/module-probleme/A2-les-deux-facons-de-dire-eu.pptx
+++ b/assets/powerpoints/module-probleme/A2-les-deux-facons-de-dire-eu.pptx
@@ -4578,7 +4578,7 @@
                 </a:solidFill>
                 <a:latin typeface="Verdana"/>
               </a:rPr>
-              <a:t>SÉANCE A2  ·  MODULE 9</a:t>
+              <a:t>SÉANCE A2  ·  MODULE 10</a:t>
             </a:r>
           </a:p>
         </p:txBody>

--- a/assets/powerpoints/module-probleme/A2-les-deux-facons-de-dire-eu.pptx
+++ b/assets/powerpoints/module-probleme/A2-les-deux-facons-de-dire-eu.pptx
@@ -4574,7 +4574,7 @@
             <a:r>
               <a:rPr sz="1300" b="1" i="0" spc="156">
                 <a:solidFill>
-                  <a:srgbClr val="6B4FBB"/>
+                  <a:srgbClr val="3B49A0"/>
                 </a:solidFill>
                 <a:latin typeface="Verdana"/>
               </a:rPr>
@@ -4914,7 +4914,7 @@
             <a:r>
               <a:rPr sz="1300" b="1" i="0" spc="156">
                 <a:solidFill>
-                  <a:srgbClr val="6B4FBB"/>
+                  <a:srgbClr val="3B49A0"/>
                 </a:solidFill>
                 <a:latin typeface="Verdana"/>
               </a:rPr>
@@ -5064,7 +5064,7 @@
             </a:avLst>
           </a:prstGeom>
           <a:solidFill>
-            <a:srgbClr val="EFEAFA"/>
+            <a:srgbClr val="E8EAFA"/>
           </a:solidFill>
           <a:ln>
             <a:noFill/>
@@ -5121,7 +5121,7 @@
             <a:r>
               <a:rPr sz="1500" b="1" i="0">
                 <a:solidFill>
-                  <a:srgbClr val="6B4FBB"/>
+                  <a:srgbClr val="3B49A0"/>
                 </a:solidFill>
                 <a:latin typeface="Verdana"/>
               </a:rPr>
@@ -5241,7 +5241,7 @@
             </a:avLst>
           </a:prstGeom>
           <a:solidFill>
-            <a:srgbClr val="EFEAFA"/>
+            <a:srgbClr val="E8EAFA"/>
           </a:solidFill>
           <a:ln>
             <a:noFill/>
@@ -5298,7 +5298,7 @@
             <a:r>
               <a:rPr sz="1500" b="1" i="0">
                 <a:solidFill>
-                  <a:srgbClr val="6B4FBB"/>
+                  <a:srgbClr val="3B49A0"/>
                 </a:solidFill>
                 <a:latin typeface="Verdana"/>
               </a:rPr>
@@ -5418,7 +5418,7 @@
             </a:avLst>
           </a:prstGeom>
           <a:solidFill>
-            <a:srgbClr val="EFEAFA"/>
+            <a:srgbClr val="E8EAFA"/>
           </a:solidFill>
           <a:ln>
             <a:noFill/>
@@ -5475,7 +5475,7 @@
             <a:r>
               <a:rPr sz="1500" b="1" i="0">
                 <a:solidFill>
-                  <a:srgbClr val="6B4FBB"/>
+                  <a:srgbClr val="3B49A0"/>
                 </a:solidFill>
                 <a:latin typeface="Verdana"/>
               </a:rPr>
@@ -5595,7 +5595,7 @@
             </a:avLst>
           </a:prstGeom>
           <a:solidFill>
-            <a:srgbClr val="EFEAFA"/>
+            <a:srgbClr val="E8EAFA"/>
           </a:solidFill>
           <a:ln>
             <a:noFill/>
@@ -5652,7 +5652,7 @@
             <a:r>
               <a:rPr sz="1500" b="1" i="0">
                 <a:solidFill>
-                  <a:srgbClr val="6B4FBB"/>
+                  <a:srgbClr val="3B49A0"/>
                 </a:solidFill>
                 <a:latin typeface="Verdana"/>
               </a:rPr>
@@ -5772,7 +5772,7 @@
             </a:avLst>
           </a:prstGeom>
           <a:solidFill>
-            <a:srgbClr val="EFEAFA"/>
+            <a:srgbClr val="E8EAFA"/>
           </a:solidFill>
           <a:ln>
             <a:noFill/>
@@ -5829,7 +5829,7 @@
             <a:r>
               <a:rPr sz="1500" b="1" i="0">
                 <a:solidFill>
-                  <a:srgbClr val="6B4FBB"/>
+                  <a:srgbClr val="3B49A0"/>
                 </a:solidFill>
                 <a:latin typeface="Verdana"/>
               </a:rPr>
@@ -5949,7 +5949,7 @@
             </a:avLst>
           </a:prstGeom>
           <a:solidFill>
-            <a:srgbClr val="EFEAFA"/>
+            <a:srgbClr val="E8EAFA"/>
           </a:solidFill>
           <a:ln>
             <a:noFill/>
@@ -6006,7 +6006,7 @@
             <a:r>
               <a:rPr sz="1500" b="1" i="0">
                 <a:solidFill>
-                  <a:srgbClr val="6B4FBB"/>
+                  <a:srgbClr val="3B49A0"/>
                 </a:solidFill>
                 <a:latin typeface="Verdana"/>
               </a:rPr>
@@ -6231,7 +6231,7 @@
             <a:r>
               <a:rPr sz="1300" b="1" i="0" spc="156">
                 <a:solidFill>
-                  <a:srgbClr val="6B4FBB"/>
+                  <a:srgbClr val="3B49A0"/>
                 </a:solidFill>
                 <a:latin typeface="Verdana"/>
               </a:rPr>
@@ -6381,7 +6381,7 @@
             </a:avLst>
           </a:prstGeom>
           <a:solidFill>
-            <a:srgbClr val="EFEAFA"/>
+            <a:srgbClr val="E8EAFA"/>
           </a:solidFill>
           <a:ln>
             <a:noFill/>
@@ -6438,7 +6438,7 @@
             <a:r>
               <a:rPr sz="1500" b="1" i="0">
                 <a:solidFill>
-                  <a:srgbClr val="6B4FBB"/>
+                  <a:srgbClr val="3B49A0"/>
                 </a:solidFill>
                 <a:latin typeface="Verdana"/>
               </a:rPr>
@@ -6549,7 +6549,7 @@
             </a:avLst>
           </a:prstGeom>
           <a:solidFill>
-            <a:srgbClr val="EFEAFA"/>
+            <a:srgbClr val="E8EAFA"/>
           </a:solidFill>
           <a:ln>
             <a:noFill/>
@@ -6606,7 +6606,7 @@
             <a:r>
               <a:rPr sz="1500" b="1" i="0">
                 <a:solidFill>
-                  <a:srgbClr val="6B4FBB"/>
+                  <a:srgbClr val="3B49A0"/>
                 </a:solidFill>
                 <a:latin typeface="Verdana"/>
               </a:rPr>
@@ -6717,7 +6717,7 @@
             </a:avLst>
           </a:prstGeom>
           <a:solidFill>
-            <a:srgbClr val="EFEAFA"/>
+            <a:srgbClr val="E8EAFA"/>
           </a:solidFill>
           <a:ln>
             <a:noFill/>
@@ -6774,7 +6774,7 @@
             <a:r>
               <a:rPr sz="1500" b="1" i="0">
                 <a:solidFill>
-                  <a:srgbClr val="6B4FBB"/>
+                  <a:srgbClr val="3B49A0"/>
                 </a:solidFill>
                 <a:latin typeface="Verdana"/>
               </a:rPr>
@@ -6885,7 +6885,7 @@
             </a:avLst>
           </a:prstGeom>
           <a:solidFill>
-            <a:srgbClr val="EFEAFA"/>
+            <a:srgbClr val="E8EAFA"/>
           </a:solidFill>
           <a:ln>
             <a:noFill/>
@@ -6942,7 +6942,7 @@
             <a:r>
               <a:rPr sz="1500" b="1" i="0">
                 <a:solidFill>
-                  <a:srgbClr val="6B4FBB"/>
+                  <a:srgbClr val="3B49A0"/>
                 </a:solidFill>
                 <a:latin typeface="Verdana"/>
               </a:rPr>
@@ -7053,7 +7053,7 @@
             </a:avLst>
           </a:prstGeom>
           <a:solidFill>
-            <a:srgbClr val="EFEAFA"/>
+            <a:srgbClr val="E8EAFA"/>
           </a:solidFill>
           <a:ln>
             <a:noFill/>
@@ -7110,7 +7110,7 @@
             <a:r>
               <a:rPr sz="1500" b="1" i="0">
                 <a:solidFill>
-                  <a:srgbClr val="6B4FBB"/>
+                  <a:srgbClr val="3B49A0"/>
                 </a:solidFill>
                 <a:latin typeface="Verdana"/>
               </a:rPr>
@@ -7221,7 +7221,7 @@
             </a:avLst>
           </a:prstGeom>
           <a:solidFill>
-            <a:srgbClr val="EFEAFA"/>
+            <a:srgbClr val="E8EAFA"/>
           </a:solidFill>
           <a:ln>
             <a:noFill/>
@@ -7278,7 +7278,7 @@
             <a:r>
               <a:rPr sz="1500" b="1" i="0">
                 <a:solidFill>
-                  <a:srgbClr val="6B4FBB"/>
+                  <a:srgbClr val="3B49A0"/>
                 </a:solidFill>
                 <a:latin typeface="Verdana"/>
               </a:rPr>
@@ -7494,7 +7494,7 @@
             <a:r>
               <a:rPr sz="1300" b="1" i="0" spc="156">
                 <a:solidFill>
-                  <a:srgbClr val="6B4FBB"/>
+                  <a:srgbClr val="3B49A0"/>
                 </a:solidFill>
                 <a:latin typeface="Verdana"/>
               </a:rPr>
@@ -7644,7 +7644,7 @@
             </a:avLst>
           </a:prstGeom>
           <a:solidFill>
-            <a:srgbClr val="EFEAFA"/>
+            <a:srgbClr val="E8EAFA"/>
           </a:solidFill>
           <a:ln>
             <a:noFill/>
@@ -7701,7 +7701,7 @@
             <a:r>
               <a:rPr sz="1500" b="1" i="0">
                 <a:solidFill>
-                  <a:srgbClr val="6B4FBB"/>
+                  <a:srgbClr val="3B49A0"/>
                 </a:solidFill>
                 <a:latin typeface="Verdana"/>
               </a:rPr>
@@ -7821,7 +7821,7 @@
             </a:avLst>
           </a:prstGeom>
           <a:solidFill>
-            <a:srgbClr val="EFEAFA"/>
+            <a:srgbClr val="E8EAFA"/>
           </a:solidFill>
           <a:ln>
             <a:noFill/>
@@ -7878,7 +7878,7 @@
             <a:r>
               <a:rPr sz="1500" b="1" i="0">
                 <a:solidFill>
-                  <a:srgbClr val="6B4FBB"/>
+                  <a:srgbClr val="3B49A0"/>
                 </a:solidFill>
                 <a:latin typeface="Verdana"/>
               </a:rPr>
@@ -7998,7 +7998,7 @@
             </a:avLst>
           </a:prstGeom>
           <a:solidFill>
-            <a:srgbClr val="EFEAFA"/>
+            <a:srgbClr val="E8EAFA"/>
           </a:solidFill>
           <a:ln>
             <a:noFill/>
@@ -8055,7 +8055,7 @@
             <a:r>
               <a:rPr sz="1500" b="1" i="0">
                 <a:solidFill>
-                  <a:srgbClr val="6B4FBB"/>
+                  <a:srgbClr val="3B49A0"/>
                 </a:solidFill>
                 <a:latin typeface="Verdana"/>
               </a:rPr>
@@ -8175,7 +8175,7 @@
             </a:avLst>
           </a:prstGeom>
           <a:solidFill>
-            <a:srgbClr val="EFEAFA"/>
+            <a:srgbClr val="E8EAFA"/>
           </a:solidFill>
           <a:ln>
             <a:noFill/>
@@ -8232,7 +8232,7 @@
             <a:r>
               <a:rPr sz="1500" b="1" i="0">
                 <a:solidFill>
-                  <a:srgbClr val="6B4FBB"/>
+                  <a:srgbClr val="3B49A0"/>
                 </a:solidFill>
                 <a:latin typeface="Verdana"/>
               </a:rPr>
@@ -8352,7 +8352,7 @@
             </a:avLst>
           </a:prstGeom>
           <a:solidFill>
-            <a:srgbClr val="EFEAFA"/>
+            <a:srgbClr val="E8EAFA"/>
           </a:solidFill>
           <a:ln>
             <a:noFill/>
@@ -8409,7 +8409,7 @@
             <a:r>
               <a:rPr sz="1500" b="1" i="0">
                 <a:solidFill>
-                  <a:srgbClr val="6B4FBB"/>
+                  <a:srgbClr val="3B49A0"/>
                 </a:solidFill>
                 <a:latin typeface="Verdana"/>
               </a:rPr>
@@ -8529,7 +8529,7 @@
             </a:avLst>
           </a:prstGeom>
           <a:solidFill>
-            <a:srgbClr val="EFEAFA"/>
+            <a:srgbClr val="E8EAFA"/>
           </a:solidFill>
           <a:ln>
             <a:noFill/>
@@ -8586,7 +8586,7 @@
             <a:r>
               <a:rPr sz="1500" b="1" i="0">
                 <a:solidFill>
-                  <a:srgbClr val="6B4FBB"/>
+                  <a:srgbClr val="3B49A0"/>
                 </a:solidFill>
                 <a:latin typeface="Verdana"/>
               </a:rPr>
@@ -8811,7 +8811,7 @@
             <a:r>
               <a:rPr sz="1300" b="1" i="0" spc="156">
                 <a:solidFill>
-                  <a:srgbClr val="6B4FBB"/>
+                  <a:srgbClr val="3B49A0"/>
                 </a:solidFill>
                 <a:latin typeface="Verdana"/>
               </a:rPr>
@@ -8961,7 +8961,7 @@
             </a:avLst>
           </a:prstGeom>
           <a:solidFill>
-            <a:srgbClr val="EFEAFA"/>
+            <a:srgbClr val="E8EAFA"/>
           </a:solidFill>
           <a:ln>
             <a:noFill/>
@@ -9018,7 +9018,7 @@
             <a:r>
               <a:rPr sz="1500" b="1" i="0">
                 <a:solidFill>
-                  <a:srgbClr val="6B4FBB"/>
+                  <a:srgbClr val="3B49A0"/>
                 </a:solidFill>
                 <a:latin typeface="Verdana"/>
               </a:rPr>
@@ -9129,7 +9129,7 @@
             </a:avLst>
           </a:prstGeom>
           <a:solidFill>
-            <a:srgbClr val="EFEAFA"/>
+            <a:srgbClr val="E8EAFA"/>
           </a:solidFill>
           <a:ln>
             <a:noFill/>
@@ -9186,7 +9186,7 @@
             <a:r>
               <a:rPr sz="1500" b="1" i="0">
                 <a:solidFill>
-                  <a:srgbClr val="6B4FBB"/>
+                  <a:srgbClr val="3B49A0"/>
                 </a:solidFill>
                 <a:latin typeface="Verdana"/>
               </a:rPr>
@@ -9297,7 +9297,7 @@
             </a:avLst>
           </a:prstGeom>
           <a:solidFill>
-            <a:srgbClr val="EFEAFA"/>
+            <a:srgbClr val="E8EAFA"/>
           </a:solidFill>
           <a:ln>
             <a:noFill/>
@@ -9354,7 +9354,7 @@
             <a:r>
               <a:rPr sz="1500" b="1" i="0">
                 <a:solidFill>
-                  <a:srgbClr val="6B4FBB"/>
+                  <a:srgbClr val="3B49A0"/>
                 </a:solidFill>
                 <a:latin typeface="Verdana"/>
               </a:rPr>
@@ -9465,7 +9465,7 @@
             </a:avLst>
           </a:prstGeom>
           <a:solidFill>
-            <a:srgbClr val="EFEAFA"/>
+            <a:srgbClr val="E8EAFA"/>
           </a:solidFill>
           <a:ln>
             <a:noFill/>
@@ -9522,7 +9522,7 @@
             <a:r>
               <a:rPr sz="1500" b="1" i="0">
                 <a:solidFill>
-                  <a:srgbClr val="6B4FBB"/>
+                  <a:srgbClr val="3B49A0"/>
                 </a:solidFill>
                 <a:latin typeface="Verdana"/>
               </a:rPr>
@@ -9633,7 +9633,7 @@
             </a:avLst>
           </a:prstGeom>
           <a:solidFill>
-            <a:srgbClr val="EFEAFA"/>
+            <a:srgbClr val="E8EAFA"/>
           </a:solidFill>
           <a:ln>
             <a:noFill/>
@@ -9690,7 +9690,7 @@
             <a:r>
               <a:rPr sz="1500" b="1" i="0">
                 <a:solidFill>
-                  <a:srgbClr val="6B4FBB"/>
+                  <a:srgbClr val="3B49A0"/>
                 </a:solidFill>
                 <a:latin typeface="Verdana"/>
               </a:rPr>
@@ -9801,7 +9801,7 @@
             </a:avLst>
           </a:prstGeom>
           <a:solidFill>
-            <a:srgbClr val="EFEAFA"/>
+            <a:srgbClr val="E8EAFA"/>
           </a:solidFill>
           <a:ln>
             <a:noFill/>
@@ -9858,7 +9858,7 @@
             <a:r>
               <a:rPr sz="1500" b="1" i="0">
                 <a:solidFill>
-                  <a:srgbClr val="6B4FBB"/>
+                  <a:srgbClr val="3B49A0"/>
                 </a:solidFill>
                 <a:latin typeface="Verdana"/>
               </a:rPr>
@@ -10074,7 +10074,7 @@
             <a:r>
               <a:rPr sz="1300" b="1" i="0" spc="156">
                 <a:solidFill>
-                  <a:srgbClr val="6B4FBB"/>
+                  <a:srgbClr val="3B49A0"/>
                 </a:solidFill>
                 <a:latin typeface="Verdana"/>
               </a:rPr>
@@ -10224,7 +10224,7 @@
             </a:avLst>
           </a:prstGeom>
           <a:solidFill>
-            <a:srgbClr val="EFEAFA"/>
+            <a:srgbClr val="E8EAFA"/>
           </a:solidFill>
           <a:ln>
             <a:noFill/>
@@ -10281,7 +10281,7 @@
             <a:r>
               <a:rPr sz="1500" b="1" i="0">
                 <a:solidFill>
-                  <a:srgbClr val="6B4FBB"/>
+                  <a:srgbClr val="3B49A0"/>
                 </a:solidFill>
                 <a:latin typeface="Verdana"/>
               </a:rPr>
@@ -10401,7 +10401,7 @@
             </a:avLst>
           </a:prstGeom>
           <a:solidFill>
-            <a:srgbClr val="EFEAFA"/>
+            <a:srgbClr val="E8EAFA"/>
           </a:solidFill>
           <a:ln>
             <a:noFill/>
@@ -10458,7 +10458,7 @@
             <a:r>
               <a:rPr sz="1500" b="1" i="0">
                 <a:solidFill>
-                  <a:srgbClr val="6B4FBB"/>
+                  <a:srgbClr val="3B49A0"/>
                 </a:solidFill>
                 <a:latin typeface="Verdana"/>
               </a:rPr>
@@ -10578,7 +10578,7 @@
             </a:avLst>
           </a:prstGeom>
           <a:solidFill>
-            <a:srgbClr val="EFEAFA"/>
+            <a:srgbClr val="E8EAFA"/>
           </a:solidFill>
           <a:ln>
             <a:noFill/>
@@ -10635,7 +10635,7 @@
             <a:r>
               <a:rPr sz="1500" b="1" i="0">
                 <a:solidFill>
-                  <a:srgbClr val="6B4FBB"/>
+                  <a:srgbClr val="3B49A0"/>
                 </a:solidFill>
                 <a:latin typeface="Verdana"/>
               </a:rPr>
@@ -10755,7 +10755,7 @@
             </a:avLst>
           </a:prstGeom>
           <a:solidFill>
-            <a:srgbClr val="EFEAFA"/>
+            <a:srgbClr val="E8EAFA"/>
           </a:solidFill>
           <a:ln>
             <a:noFill/>
@@ -10812,7 +10812,7 @@
             <a:r>
               <a:rPr sz="1500" b="1" i="0">
                 <a:solidFill>
-                  <a:srgbClr val="6B4FBB"/>
+                  <a:srgbClr val="3B49A0"/>
                 </a:solidFill>
                 <a:latin typeface="Verdana"/>
               </a:rPr>
@@ -10932,7 +10932,7 @@
             </a:avLst>
           </a:prstGeom>
           <a:solidFill>
-            <a:srgbClr val="EFEAFA"/>
+            <a:srgbClr val="E8EAFA"/>
           </a:solidFill>
           <a:ln>
             <a:noFill/>
@@ -10989,7 +10989,7 @@
             <a:r>
               <a:rPr sz="1500" b="1" i="0">
                 <a:solidFill>
-                  <a:srgbClr val="6B4FBB"/>
+                  <a:srgbClr val="3B49A0"/>
                 </a:solidFill>
                 <a:latin typeface="Verdana"/>
               </a:rPr>
@@ -11109,7 +11109,7 @@
             </a:avLst>
           </a:prstGeom>
           <a:solidFill>
-            <a:srgbClr val="EFEAFA"/>
+            <a:srgbClr val="E8EAFA"/>
           </a:solidFill>
           <a:ln>
             <a:noFill/>
@@ -11166,7 +11166,7 @@
             <a:r>
               <a:rPr sz="1500" b="1" i="0">
                 <a:solidFill>
-                  <a:srgbClr val="6B4FBB"/>
+                  <a:srgbClr val="3B49A0"/>
                 </a:solidFill>
                 <a:latin typeface="Verdana"/>
               </a:rPr>
@@ -11854,7 +11854,7 @@
             <a:r>
               <a:rPr sz="1300" b="1" i="0" spc="156">
                 <a:solidFill>
-                  <a:srgbClr val="6B4FBB"/>
+                  <a:srgbClr val="3B49A0"/>
                 </a:solidFill>
                 <a:latin typeface="Verdana"/>
               </a:rPr>
@@ -11965,7 +11965,7 @@
             </a:avLst>
           </a:prstGeom>
           <a:solidFill>
-            <a:srgbClr val="EFEAFA"/>
+            <a:srgbClr val="E8EAFA"/>
           </a:solidFill>
           <a:ln>
             <a:noFill/>
@@ -12022,7 +12022,7 @@
             <a:r>
               <a:rPr sz="1500" b="1" i="0">
                 <a:solidFill>
-                  <a:srgbClr val="6B4FBB"/>
+                  <a:srgbClr val="3B49A0"/>
                 </a:solidFill>
                 <a:latin typeface="Verdana"/>
               </a:rPr>
@@ -12133,7 +12133,7 @@
             </a:avLst>
           </a:prstGeom>
           <a:solidFill>
-            <a:srgbClr val="EFEAFA"/>
+            <a:srgbClr val="E8EAFA"/>
           </a:solidFill>
           <a:ln>
             <a:noFill/>
@@ -12190,7 +12190,7 @@
             <a:r>
               <a:rPr sz="1500" b="1" i="0">
                 <a:solidFill>
-                  <a:srgbClr val="6B4FBB"/>
+                  <a:srgbClr val="3B49A0"/>
                 </a:solidFill>
                 <a:latin typeface="Verdana"/>
               </a:rPr>
@@ -12301,7 +12301,7 @@
             </a:avLst>
           </a:prstGeom>
           <a:solidFill>
-            <a:srgbClr val="EFEAFA"/>
+            <a:srgbClr val="E8EAFA"/>
           </a:solidFill>
           <a:ln>
             <a:noFill/>
@@ -12358,7 +12358,7 @@
             <a:r>
               <a:rPr sz="1500" b="1" i="0">
                 <a:solidFill>
-                  <a:srgbClr val="6B4FBB"/>
+                  <a:srgbClr val="3B49A0"/>
                 </a:solidFill>
                 <a:latin typeface="Verdana"/>
               </a:rPr>
@@ -12574,7 +12574,7 @@
             <a:r>
               <a:rPr sz="1300" b="1" i="0" spc="156">
                 <a:solidFill>
-                  <a:srgbClr val="6B4FBB"/>
+                  <a:srgbClr val="3B49A0"/>
                 </a:solidFill>
                 <a:latin typeface="Verdana"/>
               </a:rPr>
@@ -12683,7 +12683,7 @@
             <a:avLst/>
           </a:prstGeom>
           <a:solidFill>
-            <a:srgbClr val="6B4FBB"/>
+            <a:srgbClr val="3B49A0"/>
           </a:solidFill>
           <a:ln>
             <a:noFill/>
@@ -12810,7 +12810,7 @@
             <a:avLst/>
           </a:prstGeom>
           <a:solidFill>
-            <a:srgbClr val="6B4FBB"/>
+            <a:srgbClr val="3B49A0"/>
           </a:solidFill>
           <a:ln>
             <a:noFill/>
@@ -12937,7 +12937,7 @@
             <a:avLst/>
           </a:prstGeom>
           <a:solidFill>
-            <a:srgbClr val="6B4FBB"/>
+            <a:srgbClr val="3B49A0"/>
           </a:solidFill>
           <a:ln>
             <a:noFill/>
@@ -13064,7 +13064,7 @@
             <a:avLst/>
           </a:prstGeom>
           <a:solidFill>
-            <a:srgbClr val="6B4FBB"/>
+            <a:srgbClr val="3B49A0"/>
           </a:solidFill>
           <a:ln>
             <a:noFill/>
@@ -13298,7 +13298,7 @@
             <a:r>
               <a:rPr sz="1300" b="1" i="0" spc="156">
                 <a:solidFill>
-                  <a:srgbClr val="6B4FBB"/>
+                  <a:srgbClr val="3B49A0"/>
                 </a:solidFill>
                 <a:latin typeface="Verdana"/>
               </a:rPr>
@@ -13324,7 +13324,7 @@
             </a:avLst>
           </a:prstGeom>
           <a:solidFill>
-            <a:srgbClr val="EFEAFA"/>
+            <a:srgbClr val="E8EAFA"/>
           </a:solidFill>
           <a:ln w="12700">
             <a:solidFill>
@@ -13645,7 +13645,7 @@
             <a:r>
               <a:rPr sz="1300" b="1" i="0" spc="156">
                 <a:solidFill>
-                  <a:srgbClr val="6B4FBB"/>
+                  <a:srgbClr val="3B49A0"/>
                 </a:solidFill>
                 <a:latin typeface="Verdana"/>
               </a:rPr>
@@ -13925,7 +13925,7 @@
             <a:r>
               <a:rPr sz="1800" b="1" i="0">
                 <a:solidFill>
-                  <a:srgbClr val="6B4FBB"/>
+                  <a:srgbClr val="3B49A0"/>
                 </a:solidFill>
                 <a:latin typeface="Verdana"/>
               </a:rPr>
@@ -14084,7 +14084,7 @@
             <a:r>
               <a:rPr sz="1800" b="1" i="0">
                 <a:solidFill>
-                  <a:srgbClr val="6B4FBB"/>
+                  <a:srgbClr val="3B49A0"/>
                 </a:solidFill>
                 <a:latin typeface="Verdana"/>
               </a:rPr>
@@ -14243,7 +14243,7 @@
             <a:r>
               <a:rPr sz="1800" b="1" i="0">
                 <a:solidFill>
-                  <a:srgbClr val="6B4FBB"/>
+                  <a:srgbClr val="3B49A0"/>
                 </a:solidFill>
                 <a:latin typeface="Verdana"/>
               </a:rPr>
@@ -14544,7 +14544,7 @@
             <a:r>
               <a:rPr sz="1300" b="1" i="0" spc="156">
                 <a:solidFill>
-                  <a:srgbClr val="6B4FBB"/>
+                  <a:srgbClr val="3B49A0"/>
                 </a:solidFill>
                 <a:latin typeface="Verdana"/>
               </a:rPr>
@@ -14824,7 +14824,7 @@
             <a:r>
               <a:rPr sz="1700" b="1" i="0">
                 <a:solidFill>
-                  <a:srgbClr val="6B4FBB"/>
+                  <a:srgbClr val="3B49A0"/>
                 </a:solidFill>
                 <a:latin typeface="Verdana"/>
               </a:rPr>
@@ -14983,7 +14983,7 @@
             <a:r>
               <a:rPr sz="1700" b="1" i="0">
                 <a:solidFill>
-                  <a:srgbClr val="6B4FBB"/>
+                  <a:srgbClr val="3B49A0"/>
                 </a:solidFill>
                 <a:latin typeface="Verdana"/>
               </a:rPr>
@@ -15142,7 +15142,7 @@
             <a:r>
               <a:rPr sz="1700" b="1" i="0">
                 <a:solidFill>
-                  <a:srgbClr val="6B4FBB"/>
+                  <a:srgbClr val="3B49A0"/>
                 </a:solidFill>
                 <a:latin typeface="Verdana"/>
               </a:rPr>
@@ -15301,7 +15301,7 @@
             <a:r>
               <a:rPr sz="1700" b="1" i="0">
                 <a:solidFill>
-                  <a:srgbClr val="6B4FBB"/>
+                  <a:srgbClr val="3B49A0"/>
                 </a:solidFill>
                 <a:latin typeface="Verdana"/>
               </a:rPr>
@@ -15602,7 +15602,7 @@
             <a:r>
               <a:rPr sz="1300" b="1" i="0" spc="156">
                 <a:solidFill>
-                  <a:srgbClr val="6B4FBB"/>
+                  <a:srgbClr val="3B49A0"/>
                 </a:solidFill>
                 <a:latin typeface="Verdana"/>
               </a:rPr>
@@ -16151,7 +16151,7 @@
             <a:r>
               <a:rPr sz="1300" b="1" i="0" spc="156">
                 <a:solidFill>
-                  <a:srgbClr val="6B4FBB"/>
+                  <a:srgbClr val="3B49A0"/>
                 </a:solidFill>
                 <a:latin typeface="Verdana"/>
               </a:rPr>
@@ -16275,7 +16275,7 @@
             <a:r>
               <a:rPr sz="2400" b="1" i="0">
                 <a:solidFill>
-                  <a:srgbClr val="6B4FBB"/>
+                  <a:srgbClr val="3B49A0"/>
                 </a:solidFill>
                 <a:latin typeface="Verdana"/>
               </a:rPr>
@@ -16399,7 +16399,7 @@
             <a:r>
               <a:rPr sz="2400" b="1" i="0">
                 <a:solidFill>
-                  <a:srgbClr val="6B4FBB"/>
+                  <a:srgbClr val="3B49A0"/>
                 </a:solidFill>
                 <a:latin typeface="Verdana"/>
               </a:rPr>
@@ -16523,7 +16523,7 @@
             <a:r>
               <a:rPr sz="2400" b="1" i="0">
                 <a:solidFill>
-                  <a:srgbClr val="6B4FBB"/>
+                  <a:srgbClr val="3B49A0"/>
                 </a:solidFill>
                 <a:latin typeface="Verdana"/>
               </a:rPr>
@@ -16647,7 +16647,7 @@
             <a:r>
               <a:rPr sz="2400" b="1" i="0">
                 <a:solidFill>
-                  <a:srgbClr val="6B4FBB"/>
+                  <a:srgbClr val="3B49A0"/>
                 </a:solidFill>
                 <a:latin typeface="Verdana"/>
               </a:rPr>
@@ -16863,7 +16863,7 @@
             <a:r>
               <a:rPr sz="1300" b="1" i="0" spc="156">
                 <a:solidFill>
-                  <a:srgbClr val="6B4FBB"/>
+                  <a:srgbClr val="3B49A0"/>
                 </a:solidFill>
                 <a:latin typeface="Verdana"/>
               </a:rPr>
@@ -17013,7 +17013,7 @@
             </a:avLst>
           </a:prstGeom>
           <a:solidFill>
-            <a:srgbClr val="EFEAFA"/>
+            <a:srgbClr val="E8EAFA"/>
           </a:solidFill>
           <a:ln>
             <a:noFill/>
@@ -17070,7 +17070,7 @@
             <a:r>
               <a:rPr sz="1500" b="1" i="0">
                 <a:solidFill>
-                  <a:srgbClr val="6B4FBB"/>
+                  <a:srgbClr val="3B49A0"/>
                 </a:solidFill>
                 <a:latin typeface="Verdana"/>
               </a:rPr>
@@ -17181,7 +17181,7 @@
             </a:avLst>
           </a:prstGeom>
           <a:solidFill>
-            <a:srgbClr val="EFEAFA"/>
+            <a:srgbClr val="E8EAFA"/>
           </a:solidFill>
           <a:ln>
             <a:noFill/>
@@ -17238,7 +17238,7 @@
             <a:r>
               <a:rPr sz="1500" b="1" i="0">
                 <a:solidFill>
-                  <a:srgbClr val="6B4FBB"/>
+                  <a:srgbClr val="3B49A0"/>
                 </a:solidFill>
                 <a:latin typeface="Verdana"/>
               </a:rPr>
@@ -17349,7 +17349,7 @@
             </a:avLst>
           </a:prstGeom>
           <a:solidFill>
-            <a:srgbClr val="EFEAFA"/>
+            <a:srgbClr val="E8EAFA"/>
           </a:solidFill>
           <a:ln>
             <a:noFill/>
@@ -17406,7 +17406,7 @@
             <a:r>
               <a:rPr sz="1500" b="1" i="0">
                 <a:solidFill>
-                  <a:srgbClr val="6B4FBB"/>
+                  <a:srgbClr val="3B49A0"/>
                 </a:solidFill>
                 <a:latin typeface="Verdana"/>
               </a:rPr>
@@ -17517,7 +17517,7 @@
             </a:avLst>
           </a:prstGeom>
           <a:solidFill>
-            <a:srgbClr val="EFEAFA"/>
+            <a:srgbClr val="E8EAFA"/>
           </a:solidFill>
           <a:ln>
             <a:noFill/>
@@ -17574,7 +17574,7 @@
             <a:r>
               <a:rPr sz="1500" b="1" i="0">
                 <a:solidFill>
-                  <a:srgbClr val="6B4FBB"/>
+                  <a:srgbClr val="3B49A0"/>
                 </a:solidFill>
                 <a:latin typeface="Verdana"/>
               </a:rPr>
@@ -17685,7 +17685,7 @@
             </a:avLst>
           </a:prstGeom>
           <a:solidFill>
-            <a:srgbClr val="EFEAFA"/>
+            <a:srgbClr val="E8EAFA"/>
           </a:solidFill>
           <a:ln>
             <a:noFill/>
@@ -17742,7 +17742,7 @@
             <a:r>
               <a:rPr sz="1500" b="1" i="0">
                 <a:solidFill>
-                  <a:srgbClr val="6B4FBB"/>
+                  <a:srgbClr val="3B49A0"/>
                 </a:solidFill>
                 <a:latin typeface="Verdana"/>
               </a:rPr>
@@ -17853,7 +17853,7 @@
             </a:avLst>
           </a:prstGeom>
           <a:solidFill>
-            <a:srgbClr val="EFEAFA"/>
+            <a:srgbClr val="E8EAFA"/>
           </a:solidFill>
           <a:ln>
             <a:noFill/>
@@ -17910,7 +17910,7 @@
             <a:r>
               <a:rPr sz="1500" b="1" i="0">
                 <a:solidFill>
-                  <a:srgbClr val="6B4FBB"/>
+                  <a:srgbClr val="3B49A0"/>
                 </a:solidFill>
                 <a:latin typeface="Verdana"/>
               </a:rPr>
